--- a/PPT/Day2_GN.pptx
+++ b/PPT/Day2_GN.pptx
@@ -579,52 +579,6 @@
           <a:bodyPr/>
           <a:lstStyle/>
           <a:p>
-            <a:r>
-              <a:rPr lang="en-US" dirty="0"/>
-              <a:t>Today, I will present my ongoing research about the idea of assisting choice </a:t>
-            </a:r>
-            <a:r>
-              <a:rPr lang="en-US" dirty="0" err="1"/>
-              <a:t>modellers’</a:t>
-            </a:r>
-            <a:r>
-              <a:rPr lang="en-US" dirty="0"/>
-              <a:t> workflows through artificial intelligence.</a:t>
-            </a:r>
-          </a:p>
-          <a:p>
-            <a:br>
-              <a:rPr lang="en-US" dirty="0"/>
-            </a:br>
-            <a:endParaRPr lang="en-US" dirty="0"/>
-          </a:p>
-          <a:p>
-            <a:r>
-              <a:rPr lang="en-US" dirty="0"/>
-              <a:t>In particular, I will show how we frame model specification as a Markov decision process, and then introduce </a:t>
-            </a:r>
-            <a:r>
-              <a:rPr lang="en-US" b="1" dirty="0"/>
-              <a:t>Delphos</a:t>
-            </a:r>
-            <a:r>
-              <a:rPr lang="en-US" dirty="0"/>
-              <a:t>, which is a reinforcement learning agent that automate this process.</a:t>
-            </a:r>
-          </a:p>
-          <a:p>
-            <a:br>
-              <a:rPr lang="en-US" dirty="0"/>
-            </a:br>
-            <a:endParaRPr lang="en-US" dirty="0"/>
-          </a:p>
-          <a:p>
-            <a:r>
-              <a:rPr lang="en-US" dirty="0"/>
-              <a:t>Then, I will present two applications: first, Delphos working with a single dataset; and second, Delphos working with multiple datasets at the same time to train an agent capable of transferring modelling knowledge.</a:t>
-            </a:r>
-          </a:p>
-          <a:p>
             <a:pPr marL="0" indent="0">
               <a:buFontTx/>
               <a:buNone/>
@@ -2876,247 +2830,6 @@
             <a:noAutofit/>
           </a:bodyPr>
           <a:lstStyle/>
-          <a:p>
-            <a:pPr marL="0" marR="0" lvl="0" indent="0" algn="l" defTabSz="914400" rtl="0" eaLnBrk="1" fontAlgn="auto" latinLnBrk="0" hangingPunct="1">
-              <a:lnSpc>
-                <a:spcPts val="1175"/>
-              </a:lnSpc>
-              <a:spcBef>
-                <a:spcPts val="0"/>
-              </a:spcBef>
-              <a:spcAft>
-                <a:spcPts val="800"/>
-              </a:spcAft>
-              <a:buClrTx/>
-              <a:buSzTx/>
-              <a:buFontTx/>
-              <a:buNone/>
-              <a:tabLst/>
-              <a:defRPr/>
-            </a:pPr>
-            <a:r>
-              <a:rPr lang="en-US" sz="2000" dirty="0"/>
-              <a:t>After choosing the model family, the main work is specification. </a:t>
-            </a:r>
-          </a:p>
-          <a:p>
-            <a:pPr marL="0" marR="0" lvl="0" indent="0" algn="l" defTabSz="914400" rtl="0" eaLnBrk="1" fontAlgn="auto" latinLnBrk="0" hangingPunct="1">
-              <a:lnSpc>
-                <a:spcPts val="1175"/>
-              </a:lnSpc>
-              <a:spcBef>
-                <a:spcPts val="0"/>
-              </a:spcBef>
-              <a:spcAft>
-                <a:spcPts val="800"/>
-              </a:spcAft>
-              <a:buClrTx/>
-              <a:buSzTx/>
-              <a:buFontTx/>
-              <a:buNone/>
-              <a:tabLst/>
-              <a:defRPr/>
-            </a:pPr>
-            <a:endParaRPr lang="en-US" sz="2000" dirty="0"/>
-          </a:p>
-          <a:p>
-            <a:pPr marL="0" marR="0" lvl="0" indent="0" algn="l" defTabSz="914400" rtl="0" eaLnBrk="1" fontAlgn="auto" latinLnBrk="0" hangingPunct="1">
-              <a:lnSpc>
-                <a:spcPts val="1175"/>
-              </a:lnSpc>
-              <a:spcBef>
-                <a:spcPts val="0"/>
-              </a:spcBef>
-              <a:spcAft>
-                <a:spcPts val="800"/>
-              </a:spcAft>
-              <a:buClrTx/>
-              <a:buSzTx/>
-              <a:buFontTx/>
-              <a:buNone/>
-              <a:tabLst/>
-              <a:defRPr/>
-            </a:pPr>
-            <a:r>
-              <a:rPr lang="en-US" sz="2000" dirty="0" err="1"/>
-              <a:t>Modellers</a:t>
-            </a:r>
-            <a:r>
-              <a:rPr lang="en-US" sz="2000" dirty="0"/>
-              <a:t> must define the systematic utility by making several interrelated decisions. </a:t>
-            </a:r>
-          </a:p>
-          <a:p>
-            <a:pPr marL="0" marR="0" lvl="0" indent="0" algn="l" defTabSz="914400" rtl="0" eaLnBrk="1" fontAlgn="auto" latinLnBrk="0" hangingPunct="1">
-              <a:lnSpc>
-                <a:spcPts val="1175"/>
-              </a:lnSpc>
-              <a:spcBef>
-                <a:spcPts val="0"/>
-              </a:spcBef>
-              <a:spcAft>
-                <a:spcPts val="800"/>
-              </a:spcAft>
-              <a:buClrTx/>
-              <a:buSzTx/>
-              <a:buFontTx/>
-              <a:buNone/>
-              <a:tabLst/>
-              <a:defRPr/>
-            </a:pPr>
-            <a:endParaRPr lang="en-US" sz="2000" dirty="0"/>
-          </a:p>
-          <a:p>
-            <a:pPr marL="0" marR="0" lvl="0" indent="0" algn="l" defTabSz="914400" rtl="0" eaLnBrk="1" fontAlgn="auto" latinLnBrk="0" hangingPunct="1">
-              <a:lnSpc>
-                <a:spcPts val="1175"/>
-              </a:lnSpc>
-              <a:spcBef>
-                <a:spcPts val="0"/>
-              </a:spcBef>
-              <a:spcAft>
-                <a:spcPts val="800"/>
-              </a:spcAft>
-              <a:buClrTx/>
-              <a:buSzTx/>
-              <a:buFontTx/>
-              <a:buNone/>
-              <a:tabLst/>
-              <a:defRPr/>
-            </a:pPr>
-            <a:r>
-              <a:rPr lang="en-US" sz="2000" dirty="0"/>
-              <a:t>First, which attributes matter—time, cost, headway, reliability, comfort. </a:t>
-            </a:r>
-          </a:p>
-          <a:p>
-            <a:pPr marL="0" marR="0" lvl="0" indent="0" algn="l" defTabSz="914400" rtl="0" eaLnBrk="1" fontAlgn="auto" latinLnBrk="0" hangingPunct="1">
-              <a:lnSpc>
-                <a:spcPts val="1175"/>
-              </a:lnSpc>
-              <a:spcBef>
-                <a:spcPts val="0"/>
-              </a:spcBef>
-              <a:spcAft>
-                <a:spcPts val="800"/>
-              </a:spcAft>
-              <a:buClrTx/>
-              <a:buSzTx/>
-              <a:buFontTx/>
-              <a:buNone/>
-              <a:tabLst/>
-              <a:defRPr/>
-            </a:pPr>
-            <a:r>
-              <a:rPr lang="en-US" sz="2000" dirty="0"/>
-              <a:t>Second, whether tastes are generic or alternative-specific, which changes interpretation and flexibility. </a:t>
-            </a:r>
-          </a:p>
-          <a:p>
-            <a:pPr marL="0" marR="0" lvl="0" indent="0" algn="l" defTabSz="914400" rtl="0" eaLnBrk="1" fontAlgn="auto" latinLnBrk="0" hangingPunct="1">
-              <a:lnSpc>
-                <a:spcPts val="1175"/>
-              </a:lnSpc>
-              <a:spcBef>
-                <a:spcPts val="0"/>
-              </a:spcBef>
-              <a:spcAft>
-                <a:spcPts val="800"/>
-              </a:spcAft>
-              <a:buClrTx/>
-              <a:buSzTx/>
-              <a:buFontTx/>
-              <a:buNone/>
-              <a:tabLst/>
-              <a:defRPr/>
-            </a:pPr>
-            <a:r>
-              <a:rPr lang="en-US" sz="2000" dirty="0"/>
-              <a:t>Third, whether to introduce structure like non-linear transformations or interactions to capture </a:t>
-            </a:r>
-            <a:r>
-              <a:rPr lang="en-US" sz="2000" dirty="0" err="1"/>
-              <a:t>observerded</a:t>
-            </a:r>
-            <a:r>
-              <a:rPr lang="en-US" sz="2000" dirty="0"/>
-              <a:t> heterogeneity. </a:t>
-            </a:r>
-          </a:p>
-          <a:p>
-            <a:pPr marL="0" marR="0" lvl="0" indent="0" algn="l" defTabSz="914400" rtl="0" eaLnBrk="1" fontAlgn="auto" latinLnBrk="0" hangingPunct="1">
-              <a:lnSpc>
-                <a:spcPts val="1175"/>
-              </a:lnSpc>
-              <a:spcBef>
-                <a:spcPts val="0"/>
-              </a:spcBef>
-              <a:spcAft>
-                <a:spcPts val="800"/>
-              </a:spcAft>
-              <a:buClrTx/>
-              <a:buSzTx/>
-              <a:buFontTx/>
-              <a:buNone/>
-              <a:tabLst/>
-              <a:defRPr/>
-            </a:pPr>
-            <a:r>
-              <a:rPr lang="en-US" sz="2000" dirty="0"/>
-              <a:t>And then comes estimation and evaluation. </a:t>
-            </a:r>
-          </a:p>
-          <a:p>
-            <a:pPr marL="0" marR="0" lvl="0" indent="0" algn="l" defTabSz="914400" rtl="0" eaLnBrk="1" fontAlgn="auto" latinLnBrk="0" hangingPunct="1">
-              <a:lnSpc>
-                <a:spcPts val="1175"/>
-              </a:lnSpc>
-              <a:spcBef>
-                <a:spcPts val="0"/>
-              </a:spcBef>
-              <a:spcAft>
-                <a:spcPts val="800"/>
-              </a:spcAft>
-              <a:buClrTx/>
-              <a:buSzTx/>
-              <a:buFontTx/>
-              <a:buNone/>
-              <a:tabLst/>
-              <a:defRPr/>
-            </a:pPr>
-            <a:endParaRPr lang="en-US" sz="2000" dirty="0"/>
-          </a:p>
-          <a:p>
-            <a:pPr marL="0" marR="0" lvl="0" indent="0" algn="l" defTabSz="914400" rtl="0" eaLnBrk="1" fontAlgn="auto" latinLnBrk="0" hangingPunct="1">
-              <a:lnSpc>
-                <a:spcPts val="1175"/>
-              </a:lnSpc>
-              <a:spcBef>
-                <a:spcPts val="0"/>
-              </a:spcBef>
-              <a:spcAft>
-                <a:spcPts val="800"/>
-              </a:spcAft>
-              <a:buClrTx/>
-              <a:buSzTx/>
-              <a:buFontTx/>
-              <a:buNone/>
-              <a:tabLst/>
-              <a:defRPr/>
-            </a:pPr>
-            <a:r>
-              <a:rPr lang="en-US" sz="2000" dirty="0"/>
-              <a:t>Because these choices interact, the process is iterative: changes in one part of utility can alter the significance, signs, and overall fit, so </a:t>
-            </a:r>
-            <a:r>
-              <a:rPr lang="en-US" sz="2000" dirty="0" err="1"/>
-              <a:t>modellers</a:t>
-            </a:r>
-            <a:r>
-              <a:rPr lang="en-US" sz="2000" dirty="0"/>
-              <a:t> cycle through candidates until they reach a reasonable balance.</a:t>
-            </a:r>
-          </a:p>
           <a:p>
             <a:pPr>
               <a:lnSpc>
